--- a/week5/BaySec_Week5_Foundations.pptx
+++ b/week5/BaySec_Week5_Foundations.pptx
@@ -7167,7 +7167,7 @@
               </a:defRPr>
             </a:pPr>
             <a:r>
-              <a:t>TARGET PORTAL: https://MynameisKoi.github.io/baysec/week5/</a:t>
+              <a:t>TARGET PORTAL: tinyurl.com/baysec-week5</a:t>
             </a:r>
           </a:p>
         </p:txBody>
@@ -7353,7 +7353,7 @@
               </a:defRPr>
             </a:pPr>
             <a:r>
-              <a:t>or visit baysec/week5</a:t>
+              <a:t>or visit tinyurl.com/baysec-week5</a:t>
             </a:r>
           </a:p>
         </p:txBody>

--- a/week5/BaySec_Week5_Foundations.pptx
+++ b/week5/BaySec_Week5_Foundations.pptx
@@ -929,7 +929,7 @@
           <a:lstStyle/>
           <a:p>
             <a:r>
-              <a:t>Great work everyone! As you saw, finding the flag was as simple as filtering for 'http' or 'port 8080' and opening Packet 15. Because the server did not enforce HTTPS, the auth token was transmitted in plain ASCII text. That is why TLS encryption is mandatory in production.</a:t>
+              <a:t>If you found the flag in the uplink, submit it on the portal to lock in your +150 points! If you are still working through the capture, don't worry—the challenge is open all week. You can analyze it in CyberShark or download the PCAP for Wireshark. The full step-by-step solution and forensic breakdown will be revealed at the start of Week 6.</a:t>
             </a:r>
           </a:p>
         </p:txBody>
@@ -7469,7 +7469,7 @@
               </a:defRPr>
             </a:pPr>
             <a:r>
-              <a:t>LAB DEBRIEF</a:t>
+              <a:t>LEAGUE COMPETITION</a:t>
             </a:r>
           </a:p>
         </p:txBody>
@@ -7505,7 +7505,7 @@
               </a:defRPr>
             </a:pPr>
             <a:r>
-              <a:t>0x02 Solution: Dissecting the Uplink</a:t>
+              <a:t>Challenge 0x02: Rules &amp; Submission</a:t>
             </a:r>
           </a:p>
         </p:txBody>
@@ -7560,15 +7560,31 @@
               </a:defRPr>
             </a:pPr>
             <a:r>
-              <a:t>STEP 1: FILTER &amp; IDENTIFY</a:t>
+              <a:t>🚩 EARN LEAGUE POINTS</a:t>
             </a:r>
           </a:p>
           <a:p>
             <a:pPr>
               <a:spcBef>
-                <a:spcPts val="1000"/>
+                <a:spcPts val="1200"/>
               </a:spcBef>
-              <a:defRPr sz="1350">
+              <a:defRPr sz="1350" b="1">
+                <a:solidFill>
+                  <a:srgbClr val="4ADE80"/>
+                </a:solidFill>
+                <a:latin typeface="Segoe UI"/>
+              </a:defRPr>
+            </a:pPr>
+            <a:r>
+              <a:t>• Point Value: +150 Points on Master Leaderboard</a:t>
+            </a:r>
+          </a:p>
+          <a:p>
+            <a:pPr>
+              <a:spcBef>
+                <a:spcPts val="800"/>
+              </a:spcBef>
+              <a:defRPr sz="1300">
                 <a:solidFill>
                   <a:srgbClr val="F8FAFC"/>
                 </a:solidFill>
@@ -7576,7 +7592,23 @@
               </a:defRPr>
             </a:pPr>
             <a:r>
-              <a:t>• Apply display filter: http or port 8080</a:t>
+              <a:t>• Flag Format: sfbu{...}</a:t>
+            </a:r>
+          </a:p>
+          <a:p>
+            <a:pPr>
+              <a:spcBef>
+                <a:spcPts val="800"/>
+              </a:spcBef>
+              <a:defRPr sz="1300">
+                <a:solidFill>
+                  <a:srgbClr val="F8FAFC"/>
+                </a:solidFill>
+                <a:latin typeface="Segoe UI"/>
+              </a:defRPr>
+            </a:pPr>
+            <a:r>
+              <a:t>• Target Portal: tinyurl.com/baysec-week5</a:t>
             </a:r>
           </a:p>
           <a:p>
@@ -7585,9 +7617,9 @@
                 <a:spcPts val="800"/>
               </a:spcBef>
               <a:spcAft>
-                <a:spcPts val="1000"/>
+                <a:spcPts val="1600"/>
               </a:spcAft>
-              <a:defRPr sz="1350">
+              <a:defRPr sz="1300">
                 <a:solidFill>
                   <a:srgbClr val="F8FAFC"/>
                 </a:solidFill>
@@ -7595,31 +7627,7 @@
               </a:defRPr>
             </a:pPr>
             <a:r>
-              <a:t>• Notice Packet #15: A POST request to /api/v2/telemetry/uplink:</a:t>
-            </a:r>
-          </a:p>
-          <a:p>
-            <a:pPr>
-              <a:spcAft>
-                <a:spcPts val="1400"/>
-              </a:spcAft>
-              <a:defRPr sz="1100">
-                <a:solidFill>
-                  <a:srgbClr val="4ADE80"/>
-                </a:solidFill>
-                <a:latin typeface="Consolas"/>
-              </a:defRPr>
-            </a:pPr>
-            <a:r>
-              <a:t>POST /api/v2/telemetry/uplink HTTP/1.1</a:t>
-            </a:r>
-            <a:br/>
-            <a:r>
-              <a:t>Host: gateway.baysec.sfbu:8080</a:t>
-            </a:r>
-            <a:br/>
-            <a:r>
-              <a:t>Authorization: Basic c2ZidV9hZG1pbj...==</a:t>
+              <a:t>• Analysis Tools: In-browser CyberShark or raw .pcap download</a:t>
             </a:r>
           </a:p>
           <a:p>
@@ -7632,7 +7640,7 @@
               </a:defRPr>
             </a:pPr>
             <a:r>
-              <a:t>Unlike encrypted TLS traffic on 443, port 8080 was running unencrypted plaintext HTTP!</a:t>
+              <a:t>💡 Hint: Filter for http or port 8080. Inspect the HTTP POST payload!</a:t>
             </a:r>
           </a:p>
         </p:txBody>
@@ -7687,34 +7695,47 @@
               </a:defRPr>
             </a:pPr>
             <a:r>
-              <a:t>STEP 2: INSPECT PAYLOAD</a:t>
+              <a:t>⏳ SOLUTION REVEAL &amp; DEBRIEF</a:t>
             </a:r>
           </a:p>
           <a:p>
             <a:pPr>
               <a:spcBef>
-                <a:spcPts val="800"/>
+                <a:spcPts val="1200"/>
               </a:spcBef>
-              <a:spcAft>
-                <a:spcPts val="1000"/>
-              </a:spcAft>
-              <a:defRPr sz="1300">
-                <a:solidFill>
-                  <a:srgbClr val="F8FAFC"/>
-                </a:solidFill>
-                <a:latin typeface="Segoe UI"/>
-              </a:defRPr>
-            </a:pPr>
-            <a:r>
-              <a:t>Expand 'HTML Form URL Encoded' or examine raw Hex Dump:</a:t>
-            </a:r>
-          </a:p>
-          <a:p>
-            <a:pPr>
+              <a:defRPr sz="1200" b="1">
+                <a:solidFill>
+                  <a:srgbClr val="F59E0B"/>
+                </a:solidFill>
+                <a:latin typeface="Consolas"/>
+              </a:defRPr>
+            </a:pPr>
+            <a:r>
+              <a:t>• Full Walkthrough Next Week:</a:t>
+            </a:r>
+          </a:p>
+          <a:p>
+            <a:pPr>
+              <a:spcBef>
+                <a:spcPts val="400"/>
+              </a:spcBef>
               <a:spcAft>
                 <a:spcPts val="1400"/>
               </a:spcAft>
-              <a:defRPr sz="1100">
+              <a:defRPr sz="1250">
+                <a:solidFill>
+                  <a:srgbClr val="F8FAFC"/>
+                </a:solidFill>
+                <a:latin typeface="Segoe UI"/>
+              </a:defRPr>
+            </a:pPr>
+            <a:r>
+              <a:t>The complete step-by-step packet dissection and forensic breakdown will be revealed at the START OF NEXT WEEK'S SESSION (Week 6)!</a:t>
+            </a:r>
+          </a:p>
+          <a:p>
+            <a:pPr>
+              <a:defRPr sz="1200" b="1">
                 <a:solidFill>
                   <a:srgbClr val="F59E0B"/>
                 </a:solidFill>
@@ -7722,41 +7743,39 @@
               </a:defRPr>
             </a:pPr>
             <a:r>
-              <a:t>station_id=SFBU-LAB-01&amp;</a:t>
-            </a:r>
-            <a:br/>
-            <a:r>
-              <a:t>operator_callsign=0xGhost&amp;</a:t>
-            </a:r>
-            <a:br/>
-            <a:r>
-              <a:t>auth_token=sfbu{w1r3sh4rk_p4ck3t_sn1ff3r_2026}</a:t>
-            </a:r>
-          </a:p>
-          <a:p>
-            <a:pPr>
-              <a:defRPr sz="1200">
-                <a:solidFill>
-                  <a:srgbClr val="94A3B8"/>
+              <a:t>• Advance Your Rank:</a:t>
+            </a:r>
+          </a:p>
+          <a:p>
+            <a:pPr>
+              <a:spcBef>
+                <a:spcPts val="400"/>
+              </a:spcBef>
+              <a:spcAft>
+                <a:spcPts val="1400"/>
+              </a:spcAft>
+              <a:defRPr sz="1250">
+                <a:solidFill>
+                  <a:srgbClr val="F8FAFC"/>
+                </a:solidFill>
+                <a:latin typeface="Segoe UI"/>
+              </a:defRPr>
+            </a:pPr>
+            <a:r>
+              <a:t>Submit before next week to claim your points and unlock the Operator or Sentinel tier badge.</a:t>
+            </a:r>
+          </a:p>
+          <a:p>
+            <a:pPr>
+              <a:defRPr sz="1150" b="1">
+                <a:solidFill>
+                  <a:srgbClr val="00F0FF"/>
                 </a:solidFill>
                 <a:latin typeface="Consolas"/>
               </a:defRPr>
             </a:pPr>
             <a:r>
-              <a:t>FLAG RECOVERED:</a:t>
-            </a:r>
-          </a:p>
-          <a:p>
-            <a:pPr>
-              <a:defRPr sz="1500" b="1">
-                <a:solidFill>
-                  <a:srgbClr val="4ADE80"/>
-                </a:solidFill>
-                <a:latin typeface="Consolas"/>
-              </a:defRPr>
-            </a:pPr>
-            <a:r>
-              <a:t>sfbu{w1r3sh4rk_p4ck3t_sn1ff3r_2026}</a:t>
+              <a:t>TRACK LIVE STANDINGS: baysec/leaderboard.html</a:t>
             </a:r>
           </a:p>
         </p:txBody>
@@ -7780,7 +7799,7 @@
           </a:solidFill>
           <a:ln w="19050">
             <a:solidFill>
-              <a:srgbClr val="EF4444"/>
+              <a:srgbClr val="00F0FF"/>
             </a:solidFill>
           </a:ln>
         </p:spPr>
@@ -7811,7 +7830,7 @@
               </a:defRPr>
             </a:pPr>
             <a:r>
-              <a:t>⚠️ KEY TAKEAWAY: Plaintext traffic over standard or non-standard ports (80, 8080) leaks credentials to any network tap.</a:t>
+              <a:t>🏆 Every flag submitted pushes you closer to end-of-semester Sentinel &amp; Grandmaster hardware prizes!</a:t>
             </a:r>
           </a:p>
         </p:txBody>
